--- a/marketing/output/deck/vixl-pitch-deck.pptx
+++ b/marketing/output/deck/vixl-pitch-deck.pptx
@@ -219,7 +219,7 @@
         <c:axId val="222222222"/>
         <c:scaling>
           <c:orientation val="minMax"/>
-          <c:max val="8"/>
+          <c:max val="10"/>
           <c:min val="0"/>
         </c:scaling>
         <c:delete val="0"/>
@@ -263,7 +263,7 @@
         <c:crossAx val="111111111"/>
         <c:crosses val="autoZero"/>
         <c:crossBetween val="between"/>
-        <c:majorUnit val="2"/>
+        <c:majorUnit val="5"/>
       </c:valAx>
       <c:spPr>
         <a:noFill/>
@@ -1303,7 +1303,7 @@
         </p:grpSpPr>
         <p:sp>
           <p:nvSpPr>
-            <p:cNvPr id="2" name="footer-logo-1"/>
+            <p:cNvPr id="2" name="footer-logo-v"/>
             <p:cNvSpPr/>
             <p:nvPr/>
           </p:nvSpPr>
@@ -1358,7 +1358,7 @@
         </p:sp>
         <p:sp>
           <p:nvSpPr>
-            <p:cNvPr id="3" name="footer-logo-2"/>
+            <p:cNvPr id="3" name="footer-logo-i stem"/>
             <p:cNvSpPr/>
             <p:nvPr/>
           </p:nvSpPr>
@@ -1404,7 +1404,7 @@
         </p:sp>
         <p:sp>
           <p:nvSpPr>
-            <p:cNvPr id="4" name="footer-logo-3"/>
+            <p:cNvPr id="4" name="footer-logo-i dot"/>
             <p:cNvSpPr/>
             <p:nvPr/>
           </p:nvSpPr>
@@ -1450,7 +1450,7 @@
         </p:sp>
         <p:sp>
           <p:nvSpPr>
-            <p:cNvPr id="5" name="footer-logo-4"/>
+            <p:cNvPr id="5" name="footer-logo-x"/>
             <p:cNvSpPr/>
             <p:nvPr/>
           </p:nvSpPr>
@@ -1505,7 +1505,7 @@
         </p:sp>
         <p:sp>
           <p:nvSpPr>
-            <p:cNvPr id="6" name="footer-logo-5"/>
+            <p:cNvPr id="6" name="footer-logo-x reflection band 1"/>
             <p:cNvSpPr/>
             <p:nvPr/>
           </p:nvSpPr>
@@ -1551,7 +1551,7 @@
         </p:sp>
         <p:sp>
           <p:nvSpPr>
-            <p:cNvPr id="7" name="footer-logo-6"/>
+            <p:cNvPr id="7" name="footer-logo-x reflection band 2"/>
             <p:cNvSpPr/>
             <p:nvPr/>
           </p:nvSpPr>
@@ -1597,7 +1597,7 @@
         </p:sp>
         <p:sp>
           <p:nvSpPr>
-            <p:cNvPr id="8" name="footer-logo-7"/>
+            <p:cNvPr id="8" name="footer-logo-x reflection band 3"/>
             <p:cNvSpPr/>
             <p:nvPr/>
           </p:nvSpPr>
@@ -1643,7 +1643,7 @@
         </p:sp>
         <p:sp>
           <p:nvSpPr>
-            <p:cNvPr id="9" name="footer-logo-8"/>
+            <p:cNvPr id="9" name="footer-logo-x reflection band 4"/>
             <p:cNvSpPr/>
             <p:nvPr/>
           </p:nvSpPr>
@@ -1698,7 +1698,7 @@
         </p:sp>
         <p:sp>
           <p:nvSpPr>
-            <p:cNvPr id="10" name="footer-logo-9"/>
+            <p:cNvPr id="10" name="footer-logo-x reflection band 5"/>
             <p:cNvSpPr/>
             <p:nvPr/>
           </p:nvSpPr>
@@ -1756,7 +1756,7 @@
         </p:sp>
         <p:sp>
           <p:nvSpPr>
-            <p:cNvPr id="11" name="footer-logo-10"/>
+            <p:cNvPr id="11" name="footer-logo-x reflection band 6"/>
             <p:cNvSpPr/>
             <p:nvPr/>
           </p:nvSpPr>
@@ -1814,7 +1814,7 @@
         </p:sp>
         <p:sp>
           <p:nvSpPr>
-            <p:cNvPr id="12" name="footer-logo-11"/>
+            <p:cNvPr id="12" name="footer-logo-x reflection band 7"/>
             <p:cNvSpPr/>
             <p:nvPr/>
           </p:nvSpPr>
@@ -1872,7 +1872,7 @@
         </p:sp>
         <p:sp>
           <p:nvSpPr>
-            <p:cNvPr id="13" name="footer-logo-12"/>
+            <p:cNvPr id="13" name="footer-logo-l"/>
             <p:cNvSpPr/>
             <p:nvPr/>
           </p:nvSpPr>
@@ -1918,7 +1918,7 @@
         </p:sp>
         <p:sp>
           <p:nvSpPr>
-            <p:cNvPr id="14" name="footer-logo-13"/>
+            <p:cNvPr id="14" name="footer-logo-l reflection band 1"/>
             <p:cNvSpPr/>
             <p:nvPr/>
           </p:nvSpPr>
@@ -1964,7 +1964,7 @@
         </p:sp>
         <p:sp>
           <p:nvSpPr>
-            <p:cNvPr id="15" name="footer-logo-14"/>
+            <p:cNvPr id="15" name="footer-logo-l reflection band 2"/>
             <p:cNvSpPr/>
             <p:nvPr/>
           </p:nvSpPr>
@@ -2010,7 +2010,7 @@
         </p:sp>
         <p:sp>
           <p:nvSpPr>
-            <p:cNvPr id="16" name="footer-logo-15"/>
+            <p:cNvPr id="16" name="footer-logo-l reflection band 3"/>
             <p:cNvSpPr/>
             <p:nvPr/>
           </p:nvSpPr>
@@ -2056,7 +2056,7 @@
         </p:sp>
         <p:sp>
           <p:nvSpPr>
-            <p:cNvPr id="17" name="footer-logo-16"/>
+            <p:cNvPr id="17" name="footer-logo-l reflection band 4"/>
             <p:cNvSpPr/>
             <p:nvPr/>
           </p:nvSpPr>
@@ -2102,7 +2102,7 @@
         </p:sp>
         <p:sp>
           <p:nvSpPr>
-            <p:cNvPr id="18" name="footer-logo-17"/>
+            <p:cNvPr id="18" name="footer-logo-l reflection band 5"/>
             <p:cNvSpPr/>
             <p:nvPr/>
           </p:nvSpPr>
@@ -2148,7 +2148,7 @@
         </p:sp>
         <p:sp>
           <p:nvSpPr>
-            <p:cNvPr id="19" name="footer-logo-18"/>
+            <p:cNvPr id="19" name="footer-logo-l reflection band 6"/>
             <p:cNvSpPr/>
             <p:nvPr/>
           </p:nvSpPr>
@@ -2194,7 +2194,7 @@
         </p:sp>
         <p:sp>
           <p:nvSpPr>
-            <p:cNvPr id="20" name="footer-logo-19"/>
+            <p:cNvPr id="20" name="footer-logo-l reflection band 7"/>
             <p:cNvSpPr/>
             <p:nvPr/>
           </p:nvSpPr>
@@ -3011,7 +3011,7 @@
         </p:grpSpPr>
         <p:sp>
           <p:nvSpPr>
-            <p:cNvPr id="2" name="footer-logo-1"/>
+            <p:cNvPr id="2" name="footer-logo-v"/>
             <p:cNvSpPr/>
             <p:nvPr/>
           </p:nvSpPr>
@@ -3066,7 +3066,7 @@
         </p:sp>
         <p:sp>
           <p:nvSpPr>
-            <p:cNvPr id="3" name="footer-logo-2"/>
+            <p:cNvPr id="3" name="footer-logo-i stem"/>
             <p:cNvSpPr/>
             <p:nvPr/>
           </p:nvSpPr>
@@ -3112,7 +3112,7 @@
         </p:sp>
         <p:sp>
           <p:nvSpPr>
-            <p:cNvPr id="4" name="footer-logo-3"/>
+            <p:cNvPr id="4" name="footer-logo-i dot"/>
             <p:cNvSpPr/>
             <p:nvPr/>
           </p:nvSpPr>
@@ -3158,7 +3158,7 @@
         </p:sp>
         <p:sp>
           <p:nvSpPr>
-            <p:cNvPr id="5" name="footer-logo-4"/>
+            <p:cNvPr id="5" name="footer-logo-x"/>
             <p:cNvSpPr/>
             <p:nvPr/>
           </p:nvSpPr>
@@ -3213,7 +3213,7 @@
         </p:sp>
         <p:sp>
           <p:nvSpPr>
-            <p:cNvPr id="6" name="footer-logo-5"/>
+            <p:cNvPr id="6" name="footer-logo-x reflection band 1"/>
             <p:cNvSpPr/>
             <p:nvPr/>
           </p:nvSpPr>
@@ -3259,7 +3259,7 @@
         </p:sp>
         <p:sp>
           <p:nvSpPr>
-            <p:cNvPr id="7" name="footer-logo-6"/>
+            <p:cNvPr id="7" name="footer-logo-x reflection band 2"/>
             <p:cNvSpPr/>
             <p:nvPr/>
           </p:nvSpPr>
@@ -3305,7 +3305,7 @@
         </p:sp>
         <p:sp>
           <p:nvSpPr>
-            <p:cNvPr id="8" name="footer-logo-7"/>
+            <p:cNvPr id="8" name="footer-logo-x reflection band 3"/>
             <p:cNvSpPr/>
             <p:nvPr/>
           </p:nvSpPr>
@@ -3351,7 +3351,7 @@
         </p:sp>
         <p:sp>
           <p:nvSpPr>
-            <p:cNvPr id="9" name="footer-logo-8"/>
+            <p:cNvPr id="9" name="footer-logo-x reflection band 4"/>
             <p:cNvSpPr/>
             <p:nvPr/>
           </p:nvSpPr>
@@ -3406,7 +3406,7 @@
         </p:sp>
         <p:sp>
           <p:nvSpPr>
-            <p:cNvPr id="10" name="footer-logo-9"/>
+            <p:cNvPr id="10" name="footer-logo-x reflection band 5"/>
             <p:cNvSpPr/>
             <p:nvPr/>
           </p:nvSpPr>
@@ -3464,7 +3464,7 @@
         </p:sp>
         <p:sp>
           <p:nvSpPr>
-            <p:cNvPr id="11" name="footer-logo-10"/>
+            <p:cNvPr id="11" name="footer-logo-x reflection band 6"/>
             <p:cNvSpPr/>
             <p:nvPr/>
           </p:nvSpPr>
@@ -3522,7 +3522,7 @@
         </p:sp>
         <p:sp>
           <p:nvSpPr>
-            <p:cNvPr id="12" name="footer-logo-11"/>
+            <p:cNvPr id="12" name="footer-logo-x reflection band 7"/>
             <p:cNvSpPr/>
             <p:nvPr/>
           </p:nvSpPr>
@@ -3580,7 +3580,7 @@
         </p:sp>
         <p:sp>
           <p:nvSpPr>
-            <p:cNvPr id="13" name="footer-logo-12"/>
+            <p:cNvPr id="13" name="footer-logo-l"/>
             <p:cNvSpPr/>
             <p:nvPr/>
           </p:nvSpPr>
@@ -3626,7 +3626,7 @@
         </p:sp>
         <p:sp>
           <p:nvSpPr>
-            <p:cNvPr id="14" name="footer-logo-13"/>
+            <p:cNvPr id="14" name="footer-logo-l reflection band 1"/>
             <p:cNvSpPr/>
             <p:nvPr/>
           </p:nvSpPr>
@@ -3672,7 +3672,7 @@
         </p:sp>
         <p:sp>
           <p:nvSpPr>
-            <p:cNvPr id="15" name="footer-logo-14"/>
+            <p:cNvPr id="15" name="footer-logo-l reflection band 2"/>
             <p:cNvSpPr/>
             <p:nvPr/>
           </p:nvSpPr>
@@ -3718,7 +3718,7 @@
         </p:sp>
         <p:sp>
           <p:nvSpPr>
-            <p:cNvPr id="16" name="footer-logo-15"/>
+            <p:cNvPr id="16" name="footer-logo-l reflection band 3"/>
             <p:cNvSpPr/>
             <p:nvPr/>
           </p:nvSpPr>
@@ -3764,7 +3764,7 @@
         </p:sp>
         <p:sp>
           <p:nvSpPr>
-            <p:cNvPr id="17" name="footer-logo-16"/>
+            <p:cNvPr id="17" name="footer-logo-l reflection band 4"/>
             <p:cNvSpPr/>
             <p:nvPr/>
           </p:nvSpPr>
@@ -3810,7 +3810,7 @@
         </p:sp>
         <p:sp>
           <p:nvSpPr>
-            <p:cNvPr id="18" name="footer-logo-17"/>
+            <p:cNvPr id="18" name="footer-logo-l reflection band 5"/>
             <p:cNvSpPr/>
             <p:nvPr/>
           </p:nvSpPr>
@@ -3856,7 +3856,7 @@
         </p:sp>
         <p:sp>
           <p:nvSpPr>
-            <p:cNvPr id="19" name="footer-logo-18"/>
+            <p:cNvPr id="19" name="footer-logo-l reflection band 6"/>
             <p:cNvSpPr/>
             <p:nvPr/>
           </p:nvSpPr>
@@ -3902,7 +3902,7 @@
         </p:sp>
         <p:sp>
           <p:nvSpPr>
-            <p:cNvPr id="20" name="footer-logo-19"/>
+            <p:cNvPr id="20" name="footer-logo-l reflection band 7"/>
             <p:cNvSpPr/>
             <p:nvPr/>
           </p:nvSpPr>
@@ -4785,7 +4785,7 @@
         </p:grpSpPr>
         <p:sp>
           <p:nvSpPr>
-            <p:cNvPr id="2" name="footer-logo-1"/>
+            <p:cNvPr id="2" name="footer-logo-v"/>
             <p:cNvSpPr/>
             <p:nvPr/>
           </p:nvSpPr>
@@ -4840,7 +4840,7 @@
         </p:sp>
         <p:sp>
           <p:nvSpPr>
-            <p:cNvPr id="3" name="footer-logo-2"/>
+            <p:cNvPr id="3" name="footer-logo-i stem"/>
             <p:cNvSpPr/>
             <p:nvPr/>
           </p:nvSpPr>
@@ -4886,7 +4886,7 @@
         </p:sp>
         <p:sp>
           <p:nvSpPr>
-            <p:cNvPr id="4" name="footer-logo-3"/>
+            <p:cNvPr id="4" name="footer-logo-i dot"/>
             <p:cNvSpPr/>
             <p:nvPr/>
           </p:nvSpPr>
@@ -4932,7 +4932,7 @@
         </p:sp>
         <p:sp>
           <p:nvSpPr>
-            <p:cNvPr id="5" name="footer-logo-4"/>
+            <p:cNvPr id="5" name="footer-logo-x"/>
             <p:cNvSpPr/>
             <p:nvPr/>
           </p:nvSpPr>
@@ -4987,7 +4987,7 @@
         </p:sp>
         <p:sp>
           <p:nvSpPr>
-            <p:cNvPr id="6" name="footer-logo-5"/>
+            <p:cNvPr id="6" name="footer-logo-x reflection band 1"/>
             <p:cNvSpPr/>
             <p:nvPr/>
           </p:nvSpPr>
@@ -5033,7 +5033,7 @@
         </p:sp>
         <p:sp>
           <p:nvSpPr>
-            <p:cNvPr id="7" name="footer-logo-6"/>
+            <p:cNvPr id="7" name="footer-logo-x reflection band 2"/>
             <p:cNvSpPr/>
             <p:nvPr/>
           </p:nvSpPr>
@@ -5079,7 +5079,7 @@
         </p:sp>
         <p:sp>
           <p:nvSpPr>
-            <p:cNvPr id="8" name="footer-logo-7"/>
+            <p:cNvPr id="8" name="footer-logo-x reflection band 3"/>
             <p:cNvSpPr/>
             <p:nvPr/>
           </p:nvSpPr>
@@ -5125,7 +5125,7 @@
         </p:sp>
         <p:sp>
           <p:nvSpPr>
-            <p:cNvPr id="9" name="footer-logo-8"/>
+            <p:cNvPr id="9" name="footer-logo-x reflection band 4"/>
             <p:cNvSpPr/>
             <p:nvPr/>
           </p:nvSpPr>
@@ -5180,7 +5180,7 @@
         </p:sp>
         <p:sp>
           <p:nvSpPr>
-            <p:cNvPr id="10" name="footer-logo-9"/>
+            <p:cNvPr id="10" name="footer-logo-x reflection band 5"/>
             <p:cNvSpPr/>
             <p:nvPr/>
           </p:nvSpPr>
@@ -5238,7 +5238,7 @@
         </p:sp>
         <p:sp>
           <p:nvSpPr>
-            <p:cNvPr id="11" name="footer-logo-10"/>
+            <p:cNvPr id="11" name="footer-logo-x reflection band 6"/>
             <p:cNvSpPr/>
             <p:nvPr/>
           </p:nvSpPr>
@@ -5296,7 +5296,7 @@
         </p:sp>
         <p:sp>
           <p:nvSpPr>
-            <p:cNvPr id="12" name="footer-logo-11"/>
+            <p:cNvPr id="12" name="footer-logo-x reflection band 7"/>
             <p:cNvSpPr/>
             <p:nvPr/>
           </p:nvSpPr>
@@ -5354,7 +5354,7 @@
         </p:sp>
         <p:sp>
           <p:nvSpPr>
-            <p:cNvPr id="13" name="footer-logo-12"/>
+            <p:cNvPr id="13" name="footer-logo-l"/>
             <p:cNvSpPr/>
             <p:nvPr/>
           </p:nvSpPr>
@@ -5400,7 +5400,7 @@
         </p:sp>
         <p:sp>
           <p:nvSpPr>
-            <p:cNvPr id="14" name="footer-logo-13"/>
+            <p:cNvPr id="14" name="footer-logo-l reflection band 1"/>
             <p:cNvSpPr/>
             <p:nvPr/>
           </p:nvSpPr>
@@ -5446,7 +5446,7 @@
         </p:sp>
         <p:sp>
           <p:nvSpPr>
-            <p:cNvPr id="15" name="footer-logo-14"/>
+            <p:cNvPr id="15" name="footer-logo-l reflection band 2"/>
             <p:cNvSpPr/>
             <p:nvPr/>
           </p:nvSpPr>
@@ -5492,7 +5492,7 @@
         </p:sp>
         <p:sp>
           <p:nvSpPr>
-            <p:cNvPr id="16" name="footer-logo-15"/>
+            <p:cNvPr id="16" name="footer-logo-l reflection band 3"/>
             <p:cNvSpPr/>
             <p:nvPr/>
           </p:nvSpPr>
@@ -5538,7 +5538,7 @@
         </p:sp>
         <p:sp>
           <p:nvSpPr>
-            <p:cNvPr id="17" name="footer-logo-16"/>
+            <p:cNvPr id="17" name="footer-logo-l reflection band 4"/>
             <p:cNvSpPr/>
             <p:nvPr/>
           </p:nvSpPr>
@@ -5584,7 +5584,7 @@
         </p:sp>
         <p:sp>
           <p:nvSpPr>
-            <p:cNvPr id="18" name="footer-logo-17"/>
+            <p:cNvPr id="18" name="footer-logo-l reflection band 5"/>
             <p:cNvSpPr/>
             <p:nvPr/>
           </p:nvSpPr>
@@ -5630,7 +5630,7 @@
         </p:sp>
         <p:sp>
           <p:nvSpPr>
-            <p:cNvPr id="19" name="footer-logo-18"/>
+            <p:cNvPr id="19" name="footer-logo-l reflection band 6"/>
             <p:cNvSpPr/>
             <p:nvPr/>
           </p:nvSpPr>
@@ -5676,7 +5676,7 @@
         </p:sp>
         <p:sp>
           <p:nvSpPr>
-            <p:cNvPr id="20" name="footer-logo-19"/>
+            <p:cNvPr id="20" name="footer-logo-l reflection band 7"/>
             <p:cNvSpPr/>
             <p:nvPr/>
           </p:nvSpPr>
@@ -6400,7 +6400,7 @@
         </p:grpSpPr>
         <p:sp>
           <p:nvSpPr>
-            <p:cNvPr id="2" name="footer-logo-1"/>
+            <p:cNvPr id="2" name="footer-logo-v"/>
             <p:cNvSpPr/>
             <p:nvPr/>
           </p:nvSpPr>
@@ -6455,7 +6455,7 @@
         </p:sp>
         <p:sp>
           <p:nvSpPr>
-            <p:cNvPr id="3" name="footer-logo-2"/>
+            <p:cNvPr id="3" name="footer-logo-i stem"/>
             <p:cNvSpPr/>
             <p:nvPr/>
           </p:nvSpPr>
@@ -6501,7 +6501,7 @@
         </p:sp>
         <p:sp>
           <p:nvSpPr>
-            <p:cNvPr id="4" name="footer-logo-3"/>
+            <p:cNvPr id="4" name="footer-logo-i dot"/>
             <p:cNvSpPr/>
             <p:nvPr/>
           </p:nvSpPr>
@@ -6547,7 +6547,7 @@
         </p:sp>
         <p:sp>
           <p:nvSpPr>
-            <p:cNvPr id="5" name="footer-logo-4"/>
+            <p:cNvPr id="5" name="footer-logo-x"/>
             <p:cNvSpPr/>
             <p:nvPr/>
           </p:nvSpPr>
@@ -6602,7 +6602,7 @@
         </p:sp>
         <p:sp>
           <p:nvSpPr>
-            <p:cNvPr id="6" name="footer-logo-5"/>
+            <p:cNvPr id="6" name="footer-logo-x reflection band 1"/>
             <p:cNvSpPr/>
             <p:nvPr/>
           </p:nvSpPr>
@@ -6648,7 +6648,7 @@
         </p:sp>
         <p:sp>
           <p:nvSpPr>
-            <p:cNvPr id="7" name="footer-logo-6"/>
+            <p:cNvPr id="7" name="footer-logo-x reflection band 2"/>
             <p:cNvSpPr/>
             <p:nvPr/>
           </p:nvSpPr>
@@ -6694,7 +6694,7 @@
         </p:sp>
         <p:sp>
           <p:nvSpPr>
-            <p:cNvPr id="8" name="footer-logo-7"/>
+            <p:cNvPr id="8" name="footer-logo-x reflection band 3"/>
             <p:cNvSpPr/>
             <p:nvPr/>
           </p:nvSpPr>
@@ -6740,7 +6740,7 @@
         </p:sp>
         <p:sp>
           <p:nvSpPr>
-            <p:cNvPr id="9" name="footer-logo-8"/>
+            <p:cNvPr id="9" name="footer-logo-x reflection band 4"/>
             <p:cNvSpPr/>
             <p:nvPr/>
           </p:nvSpPr>
@@ -6795,7 +6795,7 @@
         </p:sp>
         <p:sp>
           <p:nvSpPr>
-            <p:cNvPr id="10" name="footer-logo-9"/>
+            <p:cNvPr id="10" name="footer-logo-x reflection band 5"/>
             <p:cNvSpPr/>
             <p:nvPr/>
           </p:nvSpPr>
@@ -6853,7 +6853,7 @@
         </p:sp>
         <p:sp>
           <p:nvSpPr>
-            <p:cNvPr id="11" name="footer-logo-10"/>
+            <p:cNvPr id="11" name="footer-logo-x reflection band 6"/>
             <p:cNvSpPr/>
             <p:nvPr/>
           </p:nvSpPr>
@@ -6911,7 +6911,7 @@
         </p:sp>
         <p:sp>
           <p:nvSpPr>
-            <p:cNvPr id="12" name="footer-logo-11"/>
+            <p:cNvPr id="12" name="footer-logo-x reflection band 7"/>
             <p:cNvSpPr/>
             <p:nvPr/>
           </p:nvSpPr>
@@ -6969,7 +6969,7 @@
         </p:sp>
         <p:sp>
           <p:nvSpPr>
-            <p:cNvPr id="13" name="footer-logo-12"/>
+            <p:cNvPr id="13" name="footer-logo-l"/>
             <p:cNvSpPr/>
             <p:nvPr/>
           </p:nvSpPr>
@@ -7015,7 +7015,7 @@
         </p:sp>
         <p:sp>
           <p:nvSpPr>
-            <p:cNvPr id="14" name="footer-logo-13"/>
+            <p:cNvPr id="14" name="footer-logo-l reflection band 1"/>
             <p:cNvSpPr/>
             <p:nvPr/>
           </p:nvSpPr>
@@ -7061,7 +7061,7 @@
         </p:sp>
         <p:sp>
           <p:nvSpPr>
-            <p:cNvPr id="15" name="footer-logo-14"/>
+            <p:cNvPr id="15" name="footer-logo-l reflection band 2"/>
             <p:cNvSpPr/>
             <p:nvPr/>
           </p:nvSpPr>
@@ -7107,7 +7107,7 @@
         </p:sp>
         <p:sp>
           <p:nvSpPr>
-            <p:cNvPr id="16" name="footer-logo-15"/>
+            <p:cNvPr id="16" name="footer-logo-l reflection band 3"/>
             <p:cNvSpPr/>
             <p:nvPr/>
           </p:nvSpPr>
@@ -7153,7 +7153,7 @@
         </p:sp>
         <p:sp>
           <p:nvSpPr>
-            <p:cNvPr id="17" name="footer-logo-16"/>
+            <p:cNvPr id="17" name="footer-logo-l reflection band 4"/>
             <p:cNvSpPr/>
             <p:nvPr/>
           </p:nvSpPr>
@@ -7199,7 +7199,7 @@
         </p:sp>
         <p:sp>
           <p:nvSpPr>
-            <p:cNvPr id="18" name="footer-logo-17"/>
+            <p:cNvPr id="18" name="footer-logo-l reflection band 5"/>
             <p:cNvSpPr/>
             <p:nvPr/>
           </p:nvSpPr>
@@ -7245,7 +7245,7 @@
         </p:sp>
         <p:sp>
           <p:nvSpPr>
-            <p:cNvPr id="19" name="footer-logo-18"/>
+            <p:cNvPr id="19" name="footer-logo-l reflection band 6"/>
             <p:cNvSpPr/>
             <p:nvPr/>
           </p:nvSpPr>
@@ -7291,7 +7291,7 @@
         </p:sp>
         <p:sp>
           <p:nvSpPr>
-            <p:cNvPr id="20" name="footer-logo-19"/>
+            <p:cNvPr id="20" name="footer-logo-l reflection band 7"/>
             <p:cNvSpPr/>
             <p:nvPr/>
           </p:nvSpPr>
@@ -7508,12 +7508,12 @@
           </p:nvSpPr>
           <p:spPr>
             <a:xfrm>
-              <a:off x="12700" y="12700"/>
-              <a:ext cx="10388600" cy="1676400"/>
+              <a:off x="6350" y="6350"/>
+              <a:ext cx="10401300" cy="1689100"/>
             </a:xfrm>
             <a:prstGeom prst="roundRect">
               <a:avLst>
-                <a:gd name="adj" fmla="val 6439"/>
+                <a:gd name="adj" fmla="val 6391"/>
               </a:avLst>
             </a:prstGeom>
             <a:solidFill>
@@ -7976,7 +7976,7 @@
         </p:grpSpPr>
         <p:sp>
           <p:nvSpPr>
-            <p:cNvPr id="2" name="footer-logo-1"/>
+            <p:cNvPr id="2" name="footer-logo-v"/>
             <p:cNvSpPr/>
             <p:nvPr/>
           </p:nvSpPr>
@@ -8031,7 +8031,7 @@
         </p:sp>
         <p:sp>
           <p:nvSpPr>
-            <p:cNvPr id="3" name="footer-logo-2"/>
+            <p:cNvPr id="3" name="footer-logo-i stem"/>
             <p:cNvSpPr/>
             <p:nvPr/>
           </p:nvSpPr>
@@ -8077,7 +8077,7 @@
         </p:sp>
         <p:sp>
           <p:nvSpPr>
-            <p:cNvPr id="4" name="footer-logo-3"/>
+            <p:cNvPr id="4" name="footer-logo-i dot"/>
             <p:cNvSpPr/>
             <p:nvPr/>
           </p:nvSpPr>
@@ -8123,7 +8123,7 @@
         </p:sp>
         <p:sp>
           <p:nvSpPr>
-            <p:cNvPr id="5" name="footer-logo-4"/>
+            <p:cNvPr id="5" name="footer-logo-x"/>
             <p:cNvSpPr/>
             <p:nvPr/>
           </p:nvSpPr>
@@ -8178,7 +8178,7 @@
         </p:sp>
         <p:sp>
           <p:nvSpPr>
-            <p:cNvPr id="6" name="footer-logo-5"/>
+            <p:cNvPr id="6" name="footer-logo-x reflection band 1"/>
             <p:cNvSpPr/>
             <p:nvPr/>
           </p:nvSpPr>
@@ -8224,7 +8224,7 @@
         </p:sp>
         <p:sp>
           <p:nvSpPr>
-            <p:cNvPr id="7" name="footer-logo-6"/>
+            <p:cNvPr id="7" name="footer-logo-x reflection band 2"/>
             <p:cNvSpPr/>
             <p:nvPr/>
           </p:nvSpPr>
@@ -8270,7 +8270,7 @@
         </p:sp>
         <p:sp>
           <p:nvSpPr>
-            <p:cNvPr id="8" name="footer-logo-7"/>
+            <p:cNvPr id="8" name="footer-logo-x reflection band 3"/>
             <p:cNvSpPr/>
             <p:nvPr/>
           </p:nvSpPr>
@@ -8316,7 +8316,7 @@
         </p:sp>
         <p:sp>
           <p:nvSpPr>
-            <p:cNvPr id="9" name="footer-logo-8"/>
+            <p:cNvPr id="9" name="footer-logo-x reflection band 4"/>
             <p:cNvSpPr/>
             <p:nvPr/>
           </p:nvSpPr>
@@ -8371,7 +8371,7 @@
         </p:sp>
         <p:sp>
           <p:nvSpPr>
-            <p:cNvPr id="10" name="footer-logo-9"/>
+            <p:cNvPr id="10" name="footer-logo-x reflection band 5"/>
             <p:cNvSpPr/>
             <p:nvPr/>
           </p:nvSpPr>
@@ -8429,7 +8429,7 @@
         </p:sp>
         <p:sp>
           <p:nvSpPr>
-            <p:cNvPr id="11" name="footer-logo-10"/>
+            <p:cNvPr id="11" name="footer-logo-x reflection band 6"/>
             <p:cNvSpPr/>
             <p:nvPr/>
           </p:nvSpPr>
@@ -8487,7 +8487,7 @@
         </p:sp>
         <p:sp>
           <p:nvSpPr>
-            <p:cNvPr id="12" name="footer-logo-11"/>
+            <p:cNvPr id="12" name="footer-logo-x reflection band 7"/>
             <p:cNvSpPr/>
             <p:nvPr/>
           </p:nvSpPr>
@@ -8545,7 +8545,7 @@
         </p:sp>
         <p:sp>
           <p:nvSpPr>
-            <p:cNvPr id="13" name="footer-logo-12"/>
+            <p:cNvPr id="13" name="footer-logo-l"/>
             <p:cNvSpPr/>
             <p:nvPr/>
           </p:nvSpPr>
@@ -8591,7 +8591,7 @@
         </p:sp>
         <p:sp>
           <p:nvSpPr>
-            <p:cNvPr id="14" name="footer-logo-13"/>
+            <p:cNvPr id="14" name="footer-logo-l reflection band 1"/>
             <p:cNvSpPr/>
             <p:nvPr/>
           </p:nvSpPr>
@@ -8637,7 +8637,7 @@
         </p:sp>
         <p:sp>
           <p:nvSpPr>
-            <p:cNvPr id="15" name="footer-logo-14"/>
+            <p:cNvPr id="15" name="footer-logo-l reflection band 2"/>
             <p:cNvSpPr/>
             <p:nvPr/>
           </p:nvSpPr>
@@ -8683,7 +8683,7 @@
         </p:sp>
         <p:sp>
           <p:nvSpPr>
-            <p:cNvPr id="16" name="footer-logo-15"/>
+            <p:cNvPr id="16" name="footer-logo-l reflection band 3"/>
             <p:cNvSpPr/>
             <p:nvPr/>
           </p:nvSpPr>
@@ -8729,7 +8729,7 @@
         </p:sp>
         <p:sp>
           <p:nvSpPr>
-            <p:cNvPr id="17" name="footer-logo-16"/>
+            <p:cNvPr id="17" name="footer-logo-l reflection band 4"/>
             <p:cNvSpPr/>
             <p:nvPr/>
           </p:nvSpPr>
@@ -8775,7 +8775,7 @@
         </p:sp>
         <p:sp>
           <p:nvSpPr>
-            <p:cNvPr id="18" name="footer-logo-17"/>
+            <p:cNvPr id="18" name="footer-logo-l reflection band 5"/>
             <p:cNvSpPr/>
             <p:nvPr/>
           </p:nvSpPr>
@@ -8821,7 +8821,7 @@
         </p:sp>
         <p:sp>
           <p:nvSpPr>
-            <p:cNvPr id="19" name="footer-logo-18"/>
+            <p:cNvPr id="19" name="footer-logo-l reflection band 6"/>
             <p:cNvSpPr/>
             <p:nvPr/>
           </p:nvSpPr>
@@ -8867,7 +8867,7 @@
         </p:sp>
         <p:sp>
           <p:nvSpPr>
-            <p:cNvPr id="20" name="footer-logo-19"/>
+            <p:cNvPr id="20" name="footer-logo-l reflection band 7"/>
             <p:cNvSpPr/>
             <p:nvPr/>
           </p:nvSpPr>
@@ -9591,7 +9591,7 @@
         </p:grpSpPr>
         <p:sp>
           <p:nvSpPr>
-            <p:cNvPr id="2" name="footer-logo-1"/>
+            <p:cNvPr id="2" name="footer-logo-v"/>
             <p:cNvSpPr/>
             <p:nvPr/>
           </p:nvSpPr>
@@ -9646,7 +9646,7 @@
         </p:sp>
         <p:sp>
           <p:nvSpPr>
-            <p:cNvPr id="3" name="footer-logo-2"/>
+            <p:cNvPr id="3" name="footer-logo-i stem"/>
             <p:cNvSpPr/>
             <p:nvPr/>
           </p:nvSpPr>
@@ -9692,7 +9692,7 @@
         </p:sp>
         <p:sp>
           <p:nvSpPr>
-            <p:cNvPr id="4" name="footer-logo-3"/>
+            <p:cNvPr id="4" name="footer-logo-i dot"/>
             <p:cNvSpPr/>
             <p:nvPr/>
           </p:nvSpPr>
@@ -9738,7 +9738,7 @@
         </p:sp>
         <p:sp>
           <p:nvSpPr>
-            <p:cNvPr id="5" name="footer-logo-4"/>
+            <p:cNvPr id="5" name="footer-logo-x"/>
             <p:cNvSpPr/>
             <p:nvPr/>
           </p:nvSpPr>
@@ -9793,7 +9793,7 @@
         </p:sp>
         <p:sp>
           <p:nvSpPr>
-            <p:cNvPr id="6" name="footer-logo-5"/>
+            <p:cNvPr id="6" name="footer-logo-x reflection band 1"/>
             <p:cNvSpPr/>
             <p:nvPr/>
           </p:nvSpPr>
@@ -9839,7 +9839,7 @@
         </p:sp>
         <p:sp>
           <p:nvSpPr>
-            <p:cNvPr id="7" name="footer-logo-6"/>
+            <p:cNvPr id="7" name="footer-logo-x reflection band 2"/>
             <p:cNvSpPr/>
             <p:nvPr/>
           </p:nvSpPr>
@@ -9885,7 +9885,7 @@
         </p:sp>
         <p:sp>
           <p:nvSpPr>
-            <p:cNvPr id="8" name="footer-logo-7"/>
+            <p:cNvPr id="8" name="footer-logo-x reflection band 3"/>
             <p:cNvSpPr/>
             <p:nvPr/>
           </p:nvSpPr>
@@ -9931,7 +9931,7 @@
         </p:sp>
         <p:sp>
           <p:nvSpPr>
-            <p:cNvPr id="9" name="footer-logo-8"/>
+            <p:cNvPr id="9" name="footer-logo-x reflection band 4"/>
             <p:cNvSpPr/>
             <p:nvPr/>
           </p:nvSpPr>
@@ -9986,7 +9986,7 @@
         </p:sp>
         <p:sp>
           <p:nvSpPr>
-            <p:cNvPr id="10" name="footer-logo-9"/>
+            <p:cNvPr id="10" name="footer-logo-x reflection band 5"/>
             <p:cNvSpPr/>
             <p:nvPr/>
           </p:nvSpPr>
@@ -10044,7 +10044,7 @@
         </p:sp>
         <p:sp>
           <p:nvSpPr>
-            <p:cNvPr id="11" name="footer-logo-10"/>
+            <p:cNvPr id="11" name="footer-logo-x reflection band 6"/>
             <p:cNvSpPr/>
             <p:nvPr/>
           </p:nvSpPr>
@@ -10102,7 +10102,7 @@
         </p:sp>
         <p:sp>
           <p:nvSpPr>
-            <p:cNvPr id="12" name="footer-logo-11"/>
+            <p:cNvPr id="12" name="footer-logo-x reflection band 7"/>
             <p:cNvSpPr/>
             <p:nvPr/>
           </p:nvSpPr>
@@ -10160,7 +10160,7 @@
         </p:sp>
         <p:sp>
           <p:nvSpPr>
-            <p:cNvPr id="13" name="footer-logo-12"/>
+            <p:cNvPr id="13" name="footer-logo-l"/>
             <p:cNvSpPr/>
             <p:nvPr/>
           </p:nvSpPr>
@@ -10206,7 +10206,7 @@
         </p:sp>
         <p:sp>
           <p:nvSpPr>
-            <p:cNvPr id="14" name="footer-logo-13"/>
+            <p:cNvPr id="14" name="footer-logo-l reflection band 1"/>
             <p:cNvSpPr/>
             <p:nvPr/>
           </p:nvSpPr>
@@ -10252,7 +10252,7 @@
         </p:sp>
         <p:sp>
           <p:nvSpPr>
-            <p:cNvPr id="15" name="footer-logo-14"/>
+            <p:cNvPr id="15" name="footer-logo-l reflection band 2"/>
             <p:cNvSpPr/>
             <p:nvPr/>
           </p:nvSpPr>
@@ -10298,7 +10298,7 @@
         </p:sp>
         <p:sp>
           <p:nvSpPr>
-            <p:cNvPr id="16" name="footer-logo-15"/>
+            <p:cNvPr id="16" name="footer-logo-l reflection band 3"/>
             <p:cNvSpPr/>
             <p:nvPr/>
           </p:nvSpPr>
@@ -10344,7 +10344,7 @@
         </p:sp>
         <p:sp>
           <p:nvSpPr>
-            <p:cNvPr id="17" name="footer-logo-16"/>
+            <p:cNvPr id="17" name="footer-logo-l reflection band 4"/>
             <p:cNvSpPr/>
             <p:nvPr/>
           </p:nvSpPr>
@@ -10390,7 +10390,7 @@
         </p:sp>
         <p:sp>
           <p:nvSpPr>
-            <p:cNvPr id="18" name="footer-logo-17"/>
+            <p:cNvPr id="18" name="footer-logo-l reflection band 5"/>
             <p:cNvSpPr/>
             <p:nvPr/>
           </p:nvSpPr>
@@ -10436,7 +10436,7 @@
         </p:sp>
         <p:sp>
           <p:nvSpPr>
-            <p:cNvPr id="19" name="footer-logo-18"/>
+            <p:cNvPr id="19" name="footer-logo-l reflection band 6"/>
             <p:cNvSpPr/>
             <p:nvPr/>
           </p:nvSpPr>
@@ -10482,7 +10482,7 @@
         </p:sp>
         <p:sp>
           <p:nvSpPr>
-            <p:cNvPr id="20" name="footer-logo-19"/>
+            <p:cNvPr id="20" name="footer-logo-l reflection band 7"/>
             <p:cNvSpPr/>
             <p:nvPr/>
           </p:nvSpPr>
@@ -10919,12 +10919,12 @@
           </p:nvSpPr>
           <p:spPr>
             <a:xfrm>
-              <a:off x="57150" y="190500"/>
-              <a:ext cx="1460500" cy="508000"/>
+              <a:off x="47625" y="180975"/>
+              <a:ext cx="1479550" cy="527050"/>
             </a:xfrm>
             <a:prstGeom prst="roundRect">
               <a:avLst>
-                <a:gd name="adj" fmla="val 13875"/>
+                <a:gd name="adj" fmla="val 13373"/>
               </a:avLst>
             </a:prstGeom>
             <a:solidFill>
@@ -10945,12 +10945,12 @@
           </p:nvSpPr>
           <p:spPr>
             <a:xfrm>
-              <a:off x="2235200" y="190500"/>
-              <a:ext cx="1206500" cy="508000"/>
+              <a:off x="2225675" y="180975"/>
+              <a:ext cx="1225550" cy="527050"/>
             </a:xfrm>
             <a:prstGeom prst="roundRect">
               <a:avLst>
-                <a:gd name="adj" fmla="val 13875"/>
+                <a:gd name="adj" fmla="val 13373"/>
               </a:avLst>
             </a:prstGeom>
             <a:solidFill>
@@ -11019,12 +11019,12 @@
           </p:nvSpPr>
           <p:spPr>
             <a:xfrm>
-              <a:off x="6648450" y="222250"/>
-              <a:ext cx="1549400" cy="444500"/>
+              <a:off x="6638925" y="212725"/>
+              <a:ext cx="1568450" cy="463550"/>
             </a:xfrm>
             <a:prstGeom prst="roundRect">
               <a:avLst>
-                <a:gd name="adj" fmla="val 15857"/>
+                <a:gd name="adj" fmla="val 15205"/>
               </a:avLst>
             </a:prstGeom>
             <a:solidFill>
@@ -11045,12 +11045,12 @@
           </p:nvSpPr>
           <p:spPr>
             <a:xfrm>
-              <a:off x="8915400" y="190500"/>
-              <a:ext cx="1333500" cy="508000"/>
+              <a:off x="8905875" y="180975"/>
+              <a:ext cx="1352550" cy="527050"/>
             </a:xfrm>
             <a:prstGeom prst="roundRect">
               <a:avLst>
-                <a:gd name="adj" fmla="val 13875"/>
+                <a:gd name="adj" fmla="val 13373"/>
               </a:avLst>
             </a:prstGeom>
             <a:solidFill>
@@ -11406,7 +11406,7 @@
         </p:grpSpPr>
         <p:sp>
           <p:nvSpPr>
-            <p:cNvPr id="2" name="footer-logo-1"/>
+            <p:cNvPr id="2" name="footer-logo-v"/>
             <p:cNvSpPr/>
             <p:nvPr/>
           </p:nvSpPr>
@@ -11461,7 +11461,7 @@
         </p:sp>
         <p:sp>
           <p:nvSpPr>
-            <p:cNvPr id="3" name="footer-logo-2"/>
+            <p:cNvPr id="3" name="footer-logo-i stem"/>
             <p:cNvSpPr/>
             <p:nvPr/>
           </p:nvSpPr>
@@ -11507,7 +11507,7 @@
         </p:sp>
         <p:sp>
           <p:nvSpPr>
-            <p:cNvPr id="4" name="footer-logo-3"/>
+            <p:cNvPr id="4" name="footer-logo-i dot"/>
             <p:cNvSpPr/>
             <p:nvPr/>
           </p:nvSpPr>
@@ -11553,7 +11553,7 @@
         </p:sp>
         <p:sp>
           <p:nvSpPr>
-            <p:cNvPr id="5" name="footer-logo-4"/>
+            <p:cNvPr id="5" name="footer-logo-x"/>
             <p:cNvSpPr/>
             <p:nvPr/>
           </p:nvSpPr>
@@ -11608,7 +11608,7 @@
         </p:sp>
         <p:sp>
           <p:nvSpPr>
-            <p:cNvPr id="6" name="footer-logo-5"/>
+            <p:cNvPr id="6" name="footer-logo-x reflection band 1"/>
             <p:cNvSpPr/>
             <p:nvPr/>
           </p:nvSpPr>
@@ -11654,7 +11654,7 @@
         </p:sp>
         <p:sp>
           <p:nvSpPr>
-            <p:cNvPr id="7" name="footer-logo-6"/>
+            <p:cNvPr id="7" name="footer-logo-x reflection band 2"/>
             <p:cNvSpPr/>
             <p:nvPr/>
           </p:nvSpPr>
@@ -11700,7 +11700,7 @@
         </p:sp>
         <p:sp>
           <p:nvSpPr>
-            <p:cNvPr id="8" name="footer-logo-7"/>
+            <p:cNvPr id="8" name="footer-logo-x reflection band 3"/>
             <p:cNvSpPr/>
             <p:nvPr/>
           </p:nvSpPr>
@@ -11746,7 +11746,7 @@
         </p:sp>
         <p:sp>
           <p:nvSpPr>
-            <p:cNvPr id="9" name="footer-logo-8"/>
+            <p:cNvPr id="9" name="footer-logo-x reflection band 4"/>
             <p:cNvSpPr/>
             <p:nvPr/>
           </p:nvSpPr>
@@ -11801,7 +11801,7 @@
         </p:sp>
         <p:sp>
           <p:nvSpPr>
-            <p:cNvPr id="10" name="footer-logo-9"/>
+            <p:cNvPr id="10" name="footer-logo-x reflection band 5"/>
             <p:cNvSpPr/>
             <p:nvPr/>
           </p:nvSpPr>
@@ -11859,7 +11859,7 @@
         </p:sp>
         <p:sp>
           <p:nvSpPr>
-            <p:cNvPr id="11" name="footer-logo-10"/>
+            <p:cNvPr id="11" name="footer-logo-x reflection band 6"/>
             <p:cNvSpPr/>
             <p:nvPr/>
           </p:nvSpPr>
@@ -11917,7 +11917,7 @@
         </p:sp>
         <p:sp>
           <p:nvSpPr>
-            <p:cNvPr id="12" name="footer-logo-11"/>
+            <p:cNvPr id="12" name="footer-logo-x reflection band 7"/>
             <p:cNvSpPr/>
             <p:nvPr/>
           </p:nvSpPr>
@@ -11975,7 +11975,7 @@
         </p:sp>
         <p:sp>
           <p:nvSpPr>
-            <p:cNvPr id="13" name="footer-logo-12"/>
+            <p:cNvPr id="13" name="footer-logo-l"/>
             <p:cNvSpPr/>
             <p:nvPr/>
           </p:nvSpPr>
@@ -12021,7 +12021,7 @@
         </p:sp>
         <p:sp>
           <p:nvSpPr>
-            <p:cNvPr id="14" name="footer-logo-13"/>
+            <p:cNvPr id="14" name="footer-logo-l reflection band 1"/>
             <p:cNvSpPr/>
             <p:nvPr/>
           </p:nvSpPr>
@@ -12067,7 +12067,7 @@
         </p:sp>
         <p:sp>
           <p:nvSpPr>
-            <p:cNvPr id="15" name="footer-logo-14"/>
+            <p:cNvPr id="15" name="footer-logo-l reflection band 2"/>
             <p:cNvSpPr/>
             <p:nvPr/>
           </p:nvSpPr>
@@ -12113,7 +12113,7 @@
         </p:sp>
         <p:sp>
           <p:nvSpPr>
-            <p:cNvPr id="16" name="footer-logo-15"/>
+            <p:cNvPr id="16" name="footer-logo-l reflection band 3"/>
             <p:cNvSpPr/>
             <p:nvPr/>
           </p:nvSpPr>
@@ -12159,7 +12159,7 @@
         </p:sp>
         <p:sp>
           <p:nvSpPr>
-            <p:cNvPr id="17" name="footer-logo-16"/>
+            <p:cNvPr id="17" name="footer-logo-l reflection band 4"/>
             <p:cNvSpPr/>
             <p:nvPr/>
           </p:nvSpPr>
@@ -12205,7 +12205,7 @@
         </p:sp>
         <p:sp>
           <p:nvSpPr>
-            <p:cNvPr id="18" name="footer-logo-17"/>
+            <p:cNvPr id="18" name="footer-logo-l reflection band 5"/>
             <p:cNvSpPr/>
             <p:nvPr/>
           </p:nvSpPr>
@@ -12251,7 +12251,7 @@
         </p:sp>
         <p:sp>
           <p:nvSpPr>
-            <p:cNvPr id="19" name="footer-logo-18"/>
+            <p:cNvPr id="19" name="footer-logo-l reflection band 6"/>
             <p:cNvSpPr/>
             <p:nvPr/>
           </p:nvSpPr>
@@ -12297,7 +12297,7 @@
         </p:sp>
         <p:sp>
           <p:nvSpPr>
-            <p:cNvPr id="20" name="footer-logo-19"/>
+            <p:cNvPr id="20" name="footer-logo-l reflection band 7"/>
             <p:cNvSpPr/>
             <p:nvPr/>
           </p:nvSpPr>
@@ -13324,7 +13324,7 @@
         </p:grpSpPr>
         <p:sp>
           <p:nvSpPr>
-            <p:cNvPr id="2" name="footer-logo-1"/>
+            <p:cNvPr id="2" name="footer-logo-v"/>
             <p:cNvSpPr/>
             <p:nvPr/>
           </p:nvSpPr>
@@ -13379,7 +13379,7 @@
         </p:sp>
         <p:sp>
           <p:nvSpPr>
-            <p:cNvPr id="3" name="footer-logo-2"/>
+            <p:cNvPr id="3" name="footer-logo-i stem"/>
             <p:cNvSpPr/>
             <p:nvPr/>
           </p:nvSpPr>
@@ -13425,7 +13425,7 @@
         </p:sp>
         <p:sp>
           <p:nvSpPr>
-            <p:cNvPr id="4" name="footer-logo-3"/>
+            <p:cNvPr id="4" name="footer-logo-i dot"/>
             <p:cNvSpPr/>
             <p:nvPr/>
           </p:nvSpPr>
@@ -13471,7 +13471,7 @@
         </p:sp>
         <p:sp>
           <p:nvSpPr>
-            <p:cNvPr id="5" name="footer-logo-4"/>
+            <p:cNvPr id="5" name="footer-logo-x"/>
             <p:cNvSpPr/>
             <p:nvPr/>
           </p:nvSpPr>
@@ -13526,7 +13526,7 @@
         </p:sp>
         <p:sp>
           <p:nvSpPr>
-            <p:cNvPr id="6" name="footer-logo-5"/>
+            <p:cNvPr id="6" name="footer-logo-x reflection band 1"/>
             <p:cNvSpPr/>
             <p:nvPr/>
           </p:nvSpPr>
@@ -13572,7 +13572,7 @@
         </p:sp>
         <p:sp>
           <p:nvSpPr>
-            <p:cNvPr id="7" name="footer-logo-6"/>
+            <p:cNvPr id="7" name="footer-logo-x reflection band 2"/>
             <p:cNvSpPr/>
             <p:nvPr/>
           </p:nvSpPr>
@@ -13618,7 +13618,7 @@
         </p:sp>
         <p:sp>
           <p:nvSpPr>
-            <p:cNvPr id="8" name="footer-logo-7"/>
+            <p:cNvPr id="8" name="footer-logo-x reflection band 3"/>
             <p:cNvSpPr/>
             <p:nvPr/>
           </p:nvSpPr>
@@ -13664,7 +13664,7 @@
         </p:sp>
         <p:sp>
           <p:nvSpPr>
-            <p:cNvPr id="9" name="footer-logo-8"/>
+            <p:cNvPr id="9" name="footer-logo-x reflection band 4"/>
             <p:cNvSpPr/>
             <p:nvPr/>
           </p:nvSpPr>
@@ -13719,7 +13719,7 @@
         </p:sp>
         <p:sp>
           <p:nvSpPr>
-            <p:cNvPr id="10" name="footer-logo-9"/>
+            <p:cNvPr id="10" name="footer-logo-x reflection band 5"/>
             <p:cNvSpPr/>
             <p:nvPr/>
           </p:nvSpPr>
@@ -13777,7 +13777,7 @@
         </p:sp>
         <p:sp>
           <p:nvSpPr>
-            <p:cNvPr id="11" name="footer-logo-10"/>
+            <p:cNvPr id="11" name="footer-logo-x reflection band 6"/>
             <p:cNvSpPr/>
             <p:nvPr/>
           </p:nvSpPr>
@@ -13835,7 +13835,7 @@
         </p:sp>
         <p:sp>
           <p:nvSpPr>
-            <p:cNvPr id="12" name="footer-logo-11"/>
+            <p:cNvPr id="12" name="footer-logo-x reflection band 7"/>
             <p:cNvSpPr/>
             <p:nvPr/>
           </p:nvSpPr>
@@ -13893,7 +13893,7 @@
         </p:sp>
         <p:sp>
           <p:nvSpPr>
-            <p:cNvPr id="13" name="footer-logo-12"/>
+            <p:cNvPr id="13" name="footer-logo-l"/>
             <p:cNvSpPr/>
             <p:nvPr/>
           </p:nvSpPr>
@@ -13939,7 +13939,7 @@
         </p:sp>
         <p:sp>
           <p:nvSpPr>
-            <p:cNvPr id="14" name="footer-logo-13"/>
+            <p:cNvPr id="14" name="footer-logo-l reflection band 1"/>
             <p:cNvSpPr/>
             <p:nvPr/>
           </p:nvSpPr>
@@ -13985,7 +13985,7 @@
         </p:sp>
         <p:sp>
           <p:nvSpPr>
-            <p:cNvPr id="15" name="footer-logo-14"/>
+            <p:cNvPr id="15" name="footer-logo-l reflection band 2"/>
             <p:cNvSpPr/>
             <p:nvPr/>
           </p:nvSpPr>
@@ -14031,7 +14031,7 @@
         </p:sp>
         <p:sp>
           <p:nvSpPr>
-            <p:cNvPr id="16" name="footer-logo-15"/>
+            <p:cNvPr id="16" name="footer-logo-l reflection band 3"/>
             <p:cNvSpPr/>
             <p:nvPr/>
           </p:nvSpPr>
@@ -14077,7 +14077,7 @@
         </p:sp>
         <p:sp>
           <p:nvSpPr>
-            <p:cNvPr id="17" name="footer-logo-16"/>
+            <p:cNvPr id="17" name="footer-logo-l reflection band 4"/>
             <p:cNvSpPr/>
             <p:nvPr/>
           </p:nvSpPr>
@@ -14123,7 +14123,7 @@
         </p:sp>
         <p:sp>
           <p:nvSpPr>
-            <p:cNvPr id="18" name="footer-logo-17"/>
+            <p:cNvPr id="18" name="footer-logo-l reflection band 5"/>
             <p:cNvSpPr/>
             <p:nvPr/>
           </p:nvSpPr>
@@ -14169,7 +14169,7 @@
         </p:sp>
         <p:sp>
           <p:nvSpPr>
-            <p:cNvPr id="19" name="footer-logo-18"/>
+            <p:cNvPr id="19" name="footer-logo-l reflection band 6"/>
             <p:cNvSpPr/>
             <p:nvPr/>
           </p:nvSpPr>
@@ -14215,7 +14215,7 @@
         </p:sp>
         <p:sp>
           <p:nvSpPr>
-            <p:cNvPr id="20" name="footer-logo-19"/>
+            <p:cNvPr id="20" name="footer-logo-l reflection band 7"/>
             <p:cNvSpPr/>
             <p:nvPr/>
           </p:nvSpPr>
@@ -14678,7 +14678,7 @@
         </p:grpSpPr>
         <p:sp>
           <p:nvSpPr>
-            <p:cNvPr id="2" name="footer-logo-1"/>
+            <p:cNvPr id="2" name="footer-logo-v"/>
             <p:cNvSpPr/>
             <p:nvPr/>
           </p:nvSpPr>
@@ -14733,7 +14733,7 @@
         </p:sp>
         <p:sp>
           <p:nvSpPr>
-            <p:cNvPr id="3" name="footer-logo-2"/>
+            <p:cNvPr id="3" name="footer-logo-i stem"/>
             <p:cNvSpPr/>
             <p:nvPr/>
           </p:nvSpPr>
@@ -14779,7 +14779,7 @@
         </p:sp>
         <p:sp>
           <p:nvSpPr>
-            <p:cNvPr id="4" name="footer-logo-3"/>
+            <p:cNvPr id="4" name="footer-logo-i dot"/>
             <p:cNvSpPr/>
             <p:nvPr/>
           </p:nvSpPr>
@@ -14825,7 +14825,7 @@
         </p:sp>
         <p:sp>
           <p:nvSpPr>
-            <p:cNvPr id="5" name="footer-logo-4"/>
+            <p:cNvPr id="5" name="footer-logo-x"/>
             <p:cNvSpPr/>
             <p:nvPr/>
           </p:nvSpPr>
@@ -14880,7 +14880,7 @@
         </p:sp>
         <p:sp>
           <p:nvSpPr>
-            <p:cNvPr id="6" name="footer-logo-5"/>
+            <p:cNvPr id="6" name="footer-logo-x reflection band 1"/>
             <p:cNvSpPr/>
             <p:nvPr/>
           </p:nvSpPr>
@@ -14926,7 +14926,7 @@
         </p:sp>
         <p:sp>
           <p:nvSpPr>
-            <p:cNvPr id="7" name="footer-logo-6"/>
+            <p:cNvPr id="7" name="footer-logo-x reflection band 2"/>
             <p:cNvSpPr/>
             <p:nvPr/>
           </p:nvSpPr>
@@ -14972,7 +14972,7 @@
         </p:sp>
         <p:sp>
           <p:nvSpPr>
-            <p:cNvPr id="8" name="footer-logo-7"/>
+            <p:cNvPr id="8" name="footer-logo-x reflection band 3"/>
             <p:cNvSpPr/>
             <p:nvPr/>
           </p:nvSpPr>
@@ -15018,7 +15018,7 @@
         </p:sp>
         <p:sp>
           <p:nvSpPr>
-            <p:cNvPr id="9" name="footer-logo-8"/>
+            <p:cNvPr id="9" name="footer-logo-x reflection band 4"/>
             <p:cNvSpPr/>
             <p:nvPr/>
           </p:nvSpPr>
@@ -15073,7 +15073,7 @@
         </p:sp>
         <p:sp>
           <p:nvSpPr>
-            <p:cNvPr id="10" name="footer-logo-9"/>
+            <p:cNvPr id="10" name="footer-logo-x reflection band 5"/>
             <p:cNvSpPr/>
             <p:nvPr/>
           </p:nvSpPr>
@@ -15131,7 +15131,7 @@
         </p:sp>
         <p:sp>
           <p:nvSpPr>
-            <p:cNvPr id="11" name="footer-logo-10"/>
+            <p:cNvPr id="11" name="footer-logo-x reflection band 6"/>
             <p:cNvSpPr/>
             <p:nvPr/>
           </p:nvSpPr>
@@ -15189,7 +15189,7 @@
         </p:sp>
         <p:sp>
           <p:nvSpPr>
-            <p:cNvPr id="12" name="footer-logo-11"/>
+            <p:cNvPr id="12" name="footer-logo-x reflection band 7"/>
             <p:cNvSpPr/>
             <p:nvPr/>
           </p:nvSpPr>
@@ -15247,7 +15247,7 @@
         </p:sp>
         <p:sp>
           <p:nvSpPr>
-            <p:cNvPr id="13" name="footer-logo-12"/>
+            <p:cNvPr id="13" name="footer-logo-l"/>
             <p:cNvSpPr/>
             <p:nvPr/>
           </p:nvSpPr>
@@ -15293,7 +15293,7 @@
         </p:sp>
         <p:sp>
           <p:nvSpPr>
-            <p:cNvPr id="14" name="footer-logo-13"/>
+            <p:cNvPr id="14" name="footer-logo-l reflection band 1"/>
             <p:cNvSpPr/>
             <p:nvPr/>
           </p:nvSpPr>
@@ -15339,7 +15339,7 @@
         </p:sp>
         <p:sp>
           <p:nvSpPr>
-            <p:cNvPr id="15" name="footer-logo-14"/>
+            <p:cNvPr id="15" name="footer-logo-l reflection band 2"/>
             <p:cNvSpPr/>
             <p:nvPr/>
           </p:nvSpPr>
@@ -15385,7 +15385,7 @@
         </p:sp>
         <p:sp>
           <p:nvSpPr>
-            <p:cNvPr id="16" name="footer-logo-15"/>
+            <p:cNvPr id="16" name="footer-logo-l reflection band 3"/>
             <p:cNvSpPr/>
             <p:nvPr/>
           </p:nvSpPr>
@@ -15431,7 +15431,7 @@
         </p:sp>
         <p:sp>
           <p:nvSpPr>
-            <p:cNvPr id="17" name="footer-logo-16"/>
+            <p:cNvPr id="17" name="footer-logo-l reflection band 4"/>
             <p:cNvSpPr/>
             <p:nvPr/>
           </p:nvSpPr>
@@ -15477,7 +15477,7 @@
         </p:sp>
         <p:sp>
           <p:nvSpPr>
-            <p:cNvPr id="18" name="footer-logo-17"/>
+            <p:cNvPr id="18" name="footer-logo-l reflection band 5"/>
             <p:cNvSpPr/>
             <p:nvPr/>
           </p:nvSpPr>
@@ -15523,7 +15523,7 @@
         </p:sp>
         <p:sp>
           <p:nvSpPr>
-            <p:cNvPr id="19" name="footer-logo-18"/>
+            <p:cNvPr id="19" name="footer-logo-l reflection band 6"/>
             <p:cNvSpPr/>
             <p:nvPr/>
           </p:nvSpPr>
@@ -15569,7 +15569,7 @@
         </p:sp>
         <p:sp>
           <p:nvSpPr>
-            <p:cNvPr id="20" name="footer-logo-19"/>
+            <p:cNvPr id="20" name="footer-logo-l reflection band 7"/>
             <p:cNvSpPr/>
             <p:nvPr/>
           </p:nvSpPr>
@@ -16036,7 +16036,7 @@
         </p:grpSpPr>
         <p:sp>
           <p:nvSpPr>
-            <p:cNvPr id="2" name="footer-logo-1"/>
+            <p:cNvPr id="2" name="footer-logo-v"/>
             <p:cNvSpPr/>
             <p:nvPr/>
           </p:nvSpPr>
@@ -16091,7 +16091,7 @@
         </p:sp>
         <p:sp>
           <p:nvSpPr>
-            <p:cNvPr id="3" name="footer-logo-2"/>
+            <p:cNvPr id="3" name="footer-logo-i stem"/>
             <p:cNvSpPr/>
             <p:nvPr/>
           </p:nvSpPr>
@@ -16137,7 +16137,7 @@
         </p:sp>
         <p:sp>
           <p:nvSpPr>
-            <p:cNvPr id="4" name="footer-logo-3"/>
+            <p:cNvPr id="4" name="footer-logo-i dot"/>
             <p:cNvSpPr/>
             <p:nvPr/>
           </p:nvSpPr>
@@ -16183,7 +16183,7 @@
         </p:sp>
         <p:sp>
           <p:nvSpPr>
-            <p:cNvPr id="5" name="footer-logo-4"/>
+            <p:cNvPr id="5" name="footer-logo-x"/>
             <p:cNvSpPr/>
             <p:nvPr/>
           </p:nvSpPr>
@@ -16238,7 +16238,7 @@
         </p:sp>
         <p:sp>
           <p:nvSpPr>
-            <p:cNvPr id="6" name="footer-logo-5"/>
+            <p:cNvPr id="6" name="footer-logo-x reflection band 1"/>
             <p:cNvSpPr/>
             <p:nvPr/>
           </p:nvSpPr>
@@ -16284,7 +16284,7 @@
         </p:sp>
         <p:sp>
           <p:nvSpPr>
-            <p:cNvPr id="7" name="footer-logo-6"/>
+            <p:cNvPr id="7" name="footer-logo-x reflection band 2"/>
             <p:cNvSpPr/>
             <p:nvPr/>
           </p:nvSpPr>
@@ -16330,7 +16330,7 @@
         </p:sp>
         <p:sp>
           <p:nvSpPr>
-            <p:cNvPr id="8" name="footer-logo-7"/>
+            <p:cNvPr id="8" name="footer-logo-x reflection band 3"/>
             <p:cNvSpPr/>
             <p:nvPr/>
           </p:nvSpPr>
@@ -16376,7 +16376,7 @@
         </p:sp>
         <p:sp>
           <p:nvSpPr>
-            <p:cNvPr id="9" name="footer-logo-8"/>
+            <p:cNvPr id="9" name="footer-logo-x reflection band 4"/>
             <p:cNvSpPr/>
             <p:nvPr/>
           </p:nvSpPr>
@@ -16431,7 +16431,7 @@
         </p:sp>
         <p:sp>
           <p:nvSpPr>
-            <p:cNvPr id="10" name="footer-logo-9"/>
+            <p:cNvPr id="10" name="footer-logo-x reflection band 5"/>
             <p:cNvSpPr/>
             <p:nvPr/>
           </p:nvSpPr>
@@ -16489,7 +16489,7 @@
         </p:sp>
         <p:sp>
           <p:nvSpPr>
-            <p:cNvPr id="11" name="footer-logo-10"/>
+            <p:cNvPr id="11" name="footer-logo-x reflection band 6"/>
             <p:cNvSpPr/>
             <p:nvPr/>
           </p:nvSpPr>
@@ -16547,7 +16547,7 @@
         </p:sp>
         <p:sp>
           <p:nvSpPr>
-            <p:cNvPr id="12" name="footer-logo-11"/>
+            <p:cNvPr id="12" name="footer-logo-x reflection band 7"/>
             <p:cNvSpPr/>
             <p:nvPr/>
           </p:nvSpPr>
@@ -16605,7 +16605,7 @@
         </p:sp>
         <p:sp>
           <p:nvSpPr>
-            <p:cNvPr id="13" name="footer-logo-12"/>
+            <p:cNvPr id="13" name="footer-logo-l"/>
             <p:cNvSpPr/>
             <p:nvPr/>
           </p:nvSpPr>
@@ -16651,7 +16651,7 @@
         </p:sp>
         <p:sp>
           <p:nvSpPr>
-            <p:cNvPr id="14" name="footer-logo-13"/>
+            <p:cNvPr id="14" name="footer-logo-l reflection band 1"/>
             <p:cNvSpPr/>
             <p:nvPr/>
           </p:nvSpPr>
@@ -16697,7 +16697,7 @@
         </p:sp>
         <p:sp>
           <p:nvSpPr>
-            <p:cNvPr id="15" name="footer-logo-14"/>
+            <p:cNvPr id="15" name="footer-logo-l reflection band 2"/>
             <p:cNvSpPr/>
             <p:nvPr/>
           </p:nvSpPr>
@@ -16743,7 +16743,7 @@
         </p:sp>
         <p:sp>
           <p:nvSpPr>
-            <p:cNvPr id="16" name="footer-logo-15"/>
+            <p:cNvPr id="16" name="footer-logo-l reflection band 3"/>
             <p:cNvSpPr/>
             <p:nvPr/>
           </p:nvSpPr>
@@ -16789,7 +16789,7 @@
         </p:sp>
         <p:sp>
           <p:nvSpPr>
-            <p:cNvPr id="17" name="footer-logo-16"/>
+            <p:cNvPr id="17" name="footer-logo-l reflection band 4"/>
             <p:cNvSpPr/>
             <p:nvPr/>
           </p:nvSpPr>
@@ -16835,7 +16835,7 @@
         </p:sp>
         <p:sp>
           <p:nvSpPr>
-            <p:cNvPr id="18" name="footer-logo-17"/>
+            <p:cNvPr id="18" name="footer-logo-l reflection band 5"/>
             <p:cNvSpPr/>
             <p:nvPr/>
           </p:nvSpPr>
@@ -16881,7 +16881,7 @@
         </p:sp>
         <p:sp>
           <p:nvSpPr>
-            <p:cNvPr id="19" name="footer-logo-18"/>
+            <p:cNvPr id="19" name="footer-logo-l reflection band 6"/>
             <p:cNvSpPr/>
             <p:nvPr/>
           </p:nvSpPr>
@@ -16927,7 +16927,7 @@
         </p:sp>
         <p:sp>
           <p:nvSpPr>
-            <p:cNvPr id="20" name="footer-logo-19"/>
+            <p:cNvPr id="20" name="footer-logo-l reflection band 7"/>
             <p:cNvSpPr/>
             <p:nvPr/>
           </p:nvSpPr>
@@ -17666,7 +17666,7 @@
         </p:grpSpPr>
         <p:sp>
           <p:nvSpPr>
-            <p:cNvPr id="2" name="footer-logo-1"/>
+            <p:cNvPr id="2" name="footer-logo-v"/>
             <p:cNvSpPr/>
             <p:nvPr/>
           </p:nvSpPr>
@@ -17721,7 +17721,7 @@
         </p:sp>
         <p:sp>
           <p:nvSpPr>
-            <p:cNvPr id="3" name="footer-logo-2"/>
+            <p:cNvPr id="3" name="footer-logo-i stem"/>
             <p:cNvSpPr/>
             <p:nvPr/>
           </p:nvSpPr>
@@ -17767,7 +17767,7 @@
         </p:sp>
         <p:sp>
           <p:nvSpPr>
-            <p:cNvPr id="4" name="footer-logo-3"/>
+            <p:cNvPr id="4" name="footer-logo-i dot"/>
             <p:cNvSpPr/>
             <p:nvPr/>
           </p:nvSpPr>
@@ -17813,7 +17813,7 @@
         </p:sp>
         <p:sp>
           <p:nvSpPr>
-            <p:cNvPr id="5" name="footer-logo-4"/>
+            <p:cNvPr id="5" name="footer-logo-x"/>
             <p:cNvSpPr/>
             <p:nvPr/>
           </p:nvSpPr>
@@ -17868,7 +17868,7 @@
         </p:sp>
         <p:sp>
           <p:nvSpPr>
-            <p:cNvPr id="6" name="footer-logo-5"/>
+            <p:cNvPr id="6" name="footer-logo-x reflection band 1"/>
             <p:cNvSpPr/>
             <p:nvPr/>
           </p:nvSpPr>
@@ -17914,7 +17914,7 @@
         </p:sp>
         <p:sp>
           <p:nvSpPr>
-            <p:cNvPr id="7" name="footer-logo-6"/>
+            <p:cNvPr id="7" name="footer-logo-x reflection band 2"/>
             <p:cNvSpPr/>
             <p:nvPr/>
           </p:nvSpPr>
@@ -17960,7 +17960,7 @@
         </p:sp>
         <p:sp>
           <p:nvSpPr>
-            <p:cNvPr id="8" name="footer-logo-7"/>
+            <p:cNvPr id="8" name="footer-logo-x reflection band 3"/>
             <p:cNvSpPr/>
             <p:nvPr/>
           </p:nvSpPr>
@@ -18006,7 +18006,7 @@
         </p:sp>
         <p:sp>
           <p:nvSpPr>
-            <p:cNvPr id="9" name="footer-logo-8"/>
+            <p:cNvPr id="9" name="footer-logo-x reflection band 4"/>
             <p:cNvSpPr/>
             <p:nvPr/>
           </p:nvSpPr>
@@ -18061,7 +18061,7 @@
         </p:sp>
         <p:sp>
           <p:nvSpPr>
-            <p:cNvPr id="10" name="footer-logo-9"/>
+            <p:cNvPr id="10" name="footer-logo-x reflection band 5"/>
             <p:cNvSpPr/>
             <p:nvPr/>
           </p:nvSpPr>
@@ -18119,7 +18119,7 @@
         </p:sp>
         <p:sp>
           <p:nvSpPr>
-            <p:cNvPr id="11" name="footer-logo-10"/>
+            <p:cNvPr id="11" name="footer-logo-x reflection band 6"/>
             <p:cNvSpPr/>
             <p:nvPr/>
           </p:nvSpPr>
@@ -18177,7 +18177,7 @@
         </p:sp>
         <p:sp>
           <p:nvSpPr>
-            <p:cNvPr id="12" name="footer-logo-11"/>
+            <p:cNvPr id="12" name="footer-logo-x reflection band 7"/>
             <p:cNvSpPr/>
             <p:nvPr/>
           </p:nvSpPr>
@@ -18235,7 +18235,7 @@
         </p:sp>
         <p:sp>
           <p:nvSpPr>
-            <p:cNvPr id="13" name="footer-logo-12"/>
+            <p:cNvPr id="13" name="footer-logo-l"/>
             <p:cNvSpPr/>
             <p:nvPr/>
           </p:nvSpPr>
@@ -18281,7 +18281,7 @@
         </p:sp>
         <p:sp>
           <p:nvSpPr>
-            <p:cNvPr id="14" name="footer-logo-13"/>
+            <p:cNvPr id="14" name="footer-logo-l reflection band 1"/>
             <p:cNvSpPr/>
             <p:nvPr/>
           </p:nvSpPr>
@@ -18327,7 +18327,7 @@
         </p:sp>
         <p:sp>
           <p:nvSpPr>
-            <p:cNvPr id="15" name="footer-logo-14"/>
+            <p:cNvPr id="15" name="footer-logo-l reflection band 2"/>
             <p:cNvSpPr/>
             <p:nvPr/>
           </p:nvSpPr>
@@ -18373,7 +18373,7 @@
         </p:sp>
         <p:sp>
           <p:nvSpPr>
-            <p:cNvPr id="16" name="footer-logo-15"/>
+            <p:cNvPr id="16" name="footer-logo-l reflection band 3"/>
             <p:cNvSpPr/>
             <p:nvPr/>
           </p:nvSpPr>
@@ -18419,7 +18419,7 @@
         </p:sp>
         <p:sp>
           <p:nvSpPr>
-            <p:cNvPr id="17" name="footer-logo-16"/>
+            <p:cNvPr id="17" name="footer-logo-l reflection band 4"/>
             <p:cNvSpPr/>
             <p:nvPr/>
           </p:nvSpPr>
@@ -18465,7 +18465,7 @@
         </p:sp>
         <p:sp>
           <p:nvSpPr>
-            <p:cNvPr id="18" name="footer-logo-17"/>
+            <p:cNvPr id="18" name="footer-logo-l reflection band 5"/>
             <p:cNvSpPr/>
             <p:nvPr/>
           </p:nvSpPr>
@@ -18511,7 +18511,7 @@
         </p:sp>
         <p:sp>
           <p:nvSpPr>
-            <p:cNvPr id="19" name="footer-logo-18"/>
+            <p:cNvPr id="19" name="footer-logo-l reflection band 6"/>
             <p:cNvSpPr/>
             <p:nvPr/>
           </p:nvSpPr>
@@ -18557,7 +18557,7 @@
         </p:sp>
         <p:sp>
           <p:nvSpPr>
-            <p:cNvPr id="20" name="footer-logo-19"/>
+            <p:cNvPr id="20" name="footer-logo-l reflection band 7"/>
             <p:cNvSpPr/>
             <p:nvPr/>
           </p:nvSpPr>
@@ -19281,7 +19281,7 @@
         </p:grpSpPr>
         <p:sp>
           <p:nvSpPr>
-            <p:cNvPr id="2" name="footer-logo-1"/>
+            <p:cNvPr id="2" name="footer-logo-v"/>
             <p:cNvSpPr/>
             <p:nvPr/>
           </p:nvSpPr>
@@ -19336,7 +19336,7 @@
         </p:sp>
         <p:sp>
           <p:nvSpPr>
-            <p:cNvPr id="3" name="footer-logo-2"/>
+            <p:cNvPr id="3" name="footer-logo-i stem"/>
             <p:cNvSpPr/>
             <p:nvPr/>
           </p:nvSpPr>
@@ -19382,7 +19382,7 @@
         </p:sp>
         <p:sp>
           <p:nvSpPr>
-            <p:cNvPr id="4" name="footer-logo-3"/>
+            <p:cNvPr id="4" name="footer-logo-i dot"/>
             <p:cNvSpPr/>
             <p:nvPr/>
           </p:nvSpPr>
@@ -19428,7 +19428,7 @@
         </p:sp>
         <p:sp>
           <p:nvSpPr>
-            <p:cNvPr id="5" name="footer-logo-4"/>
+            <p:cNvPr id="5" name="footer-logo-x"/>
             <p:cNvSpPr/>
             <p:nvPr/>
           </p:nvSpPr>
@@ -19483,7 +19483,7 @@
         </p:sp>
         <p:sp>
           <p:nvSpPr>
-            <p:cNvPr id="6" name="footer-logo-5"/>
+            <p:cNvPr id="6" name="footer-logo-x reflection band 1"/>
             <p:cNvSpPr/>
             <p:nvPr/>
           </p:nvSpPr>
@@ -19529,7 +19529,7 @@
         </p:sp>
         <p:sp>
           <p:nvSpPr>
-            <p:cNvPr id="7" name="footer-logo-6"/>
+            <p:cNvPr id="7" name="footer-logo-x reflection band 2"/>
             <p:cNvSpPr/>
             <p:nvPr/>
           </p:nvSpPr>
@@ -19575,7 +19575,7 @@
         </p:sp>
         <p:sp>
           <p:nvSpPr>
-            <p:cNvPr id="8" name="footer-logo-7"/>
+            <p:cNvPr id="8" name="footer-logo-x reflection band 3"/>
             <p:cNvSpPr/>
             <p:nvPr/>
           </p:nvSpPr>
@@ -19621,7 +19621,7 @@
         </p:sp>
         <p:sp>
           <p:nvSpPr>
-            <p:cNvPr id="9" name="footer-logo-8"/>
+            <p:cNvPr id="9" name="footer-logo-x reflection band 4"/>
             <p:cNvSpPr/>
             <p:nvPr/>
           </p:nvSpPr>
@@ -19676,7 +19676,7 @@
         </p:sp>
         <p:sp>
           <p:nvSpPr>
-            <p:cNvPr id="10" name="footer-logo-9"/>
+            <p:cNvPr id="10" name="footer-logo-x reflection band 5"/>
             <p:cNvSpPr/>
             <p:nvPr/>
           </p:nvSpPr>
@@ -19734,7 +19734,7 @@
         </p:sp>
         <p:sp>
           <p:nvSpPr>
-            <p:cNvPr id="11" name="footer-logo-10"/>
+            <p:cNvPr id="11" name="footer-logo-x reflection band 6"/>
             <p:cNvSpPr/>
             <p:nvPr/>
           </p:nvSpPr>
@@ -19792,7 +19792,7 @@
         </p:sp>
         <p:sp>
           <p:nvSpPr>
-            <p:cNvPr id="12" name="footer-logo-11"/>
+            <p:cNvPr id="12" name="footer-logo-x reflection band 7"/>
             <p:cNvSpPr/>
             <p:nvPr/>
           </p:nvSpPr>
@@ -19850,7 +19850,7 @@
         </p:sp>
         <p:sp>
           <p:nvSpPr>
-            <p:cNvPr id="13" name="footer-logo-12"/>
+            <p:cNvPr id="13" name="footer-logo-l"/>
             <p:cNvSpPr/>
             <p:nvPr/>
           </p:nvSpPr>
@@ -19896,7 +19896,7 @@
         </p:sp>
         <p:sp>
           <p:nvSpPr>
-            <p:cNvPr id="14" name="footer-logo-13"/>
+            <p:cNvPr id="14" name="footer-logo-l reflection band 1"/>
             <p:cNvSpPr/>
             <p:nvPr/>
           </p:nvSpPr>
@@ -19942,7 +19942,7 @@
         </p:sp>
         <p:sp>
           <p:nvSpPr>
-            <p:cNvPr id="15" name="footer-logo-14"/>
+            <p:cNvPr id="15" name="footer-logo-l reflection band 2"/>
             <p:cNvSpPr/>
             <p:nvPr/>
           </p:nvSpPr>
@@ -19988,7 +19988,7 @@
         </p:sp>
         <p:sp>
           <p:nvSpPr>
-            <p:cNvPr id="16" name="footer-logo-15"/>
+            <p:cNvPr id="16" name="footer-logo-l reflection band 3"/>
             <p:cNvSpPr/>
             <p:nvPr/>
           </p:nvSpPr>
@@ -20034,7 +20034,7 @@
         </p:sp>
         <p:sp>
           <p:nvSpPr>
-            <p:cNvPr id="17" name="footer-logo-16"/>
+            <p:cNvPr id="17" name="footer-logo-l reflection band 4"/>
             <p:cNvSpPr/>
             <p:nvPr/>
           </p:nvSpPr>
@@ -20080,7 +20080,7 @@
         </p:sp>
         <p:sp>
           <p:nvSpPr>
-            <p:cNvPr id="18" name="footer-logo-17"/>
+            <p:cNvPr id="18" name="footer-logo-l reflection band 5"/>
             <p:cNvSpPr/>
             <p:nvPr/>
           </p:nvSpPr>
@@ -20126,7 +20126,7 @@
         </p:sp>
         <p:sp>
           <p:nvSpPr>
-            <p:cNvPr id="19" name="footer-logo-18"/>
+            <p:cNvPr id="19" name="footer-logo-l reflection band 6"/>
             <p:cNvSpPr/>
             <p:nvPr/>
           </p:nvSpPr>
@@ -20172,7 +20172,7 @@
         </p:sp>
         <p:sp>
           <p:nvSpPr>
-            <p:cNvPr id="20" name="footer-logo-19"/>
+            <p:cNvPr id="20" name="footer-logo-l reflection band 7"/>
             <p:cNvSpPr/>
             <p:nvPr/>
           </p:nvSpPr>
